--- a/dist/초5/수학/도형과측정/초5_수학_도형과측정_08_사다리꼴과마름모의넓이.pptx
+++ b/dist/초5/수학/도형과측정/초5_수학_도형과측정_08_사다리꼴과마름모의넓이.pptx
@@ -121,13 +121,13 @@
   <p:extLst>
     <p:ext uri="{521415D9-36F7-43E2-AB2F-B90AF26B5E84}">
       <p14:sectionLst xmlns:p14="http://schemas.microsoft.com/office/powerpoint/2010/main">
-        <p14:section name="도입" id="{66b36390-39d7-d9bf-f44d-7c076f69319d}">
+        <p14:section name="도입" id="{03f2aae8-b609-1919-5783-995c0175fa05}">
           <p14:sldIdLst>
             <p14:sldId id="256"/>
             <p14:sldId id="257"/>
           </p14:sldIdLst>
         </p14:section>
-        <p14:section name="개념" id="{97ff3533-e6d8-cca8-b45c-4bb077ef9a73}">
+        <p14:section name="개념" id="{36dc7c5d-e3dc-5e39-d618-e058f2d97bba}">
           <p14:sldIdLst>
             <p14:sldId id="258"/>
             <p14:sldId id="259"/>
@@ -136,32 +136,32 @@
             <p14:sldId id="264"/>
           </p14:sldIdLst>
         </p14:section>
-        <p14:section name="연습" id="{b1f1c1c7-1364-9ae3-e354-a96ee445c8eb}">
+        <p14:section name="연습" id="{9f90df0d-0bd4-873a-bf78-00d2ab0036fb}">
           <p14:sldIdLst>
             <p14:sldId id="261"/>
             <p14:sldId id="262"/>
             <p14:sldId id="265"/>
           </p14:sldIdLst>
         </p14:section>
-        <p14:section name="개념" id="{54ab42f5-1f52-80c3-4aae-cc6174a7c5f4}">
+        <p14:section name="개념" id="{7cf14929-9437-a489-a580-e89605b1444b}">
           <p14:sldIdLst/>
         </p14:section>
-        <p14:section name="연습" id="{969c1689-db9f-57fa-67d4-27c3cc2798ab}">
+        <p14:section name="연습" id="{0f3e45d4-fee7-40c6-9250-6041d0c797ce}">
           <p14:sldIdLst/>
         </p14:section>
-        <p14:section name="확인" id="{b09665e9-6d7e-b08b-d195-fb4112c23754}">
+        <p14:section name="확인" id="{9b26699d-5d83-d8b8-61b1-0492498de0ae}">
           <p14:sldIdLst>
             <p14:sldId id="266"/>
             <p14:sldId id="267"/>
             <p14:sldId id="268"/>
           </p14:sldIdLst>
         </p14:section>
-        <p14:section name="정리" id="{de3e7b38-06be-b4a5-e3c9-034c79b7b411}">
+        <p14:section name="정리" id="{3189d9b4-bab8-adef-ae6a-59dd9dbcdd58}">
           <p14:sldIdLst>
             <p14:sldId id="269"/>
           </p14:sldIdLst>
         </p14:section>
-        <p14:section name="보충" id="{f2ae4878-0ef6-a8b1-d90f-7357137b38bb}">
+        <p14:section name="보충" id="{8fec5aa4-89e1-5e2f-bba3-5a7f998131b7}">
           <p14:sldIdLst>
             <p14:sldId id="270"/>
           </p14:sldIdLst>
@@ -3906,8 +3906,8 @@
         </p:nvSpPr>
         <p:spPr>
           <a:xfrm>
-            <a:off x="1616710" y="2365248"/>
-            <a:ext cx="3226816" cy="2420112"/>
+            <a:off x="1837250" y="2530653"/>
+            <a:ext cx="2785737" cy="2089302"/>
           </a:xfrm>
           <a:custGeom>
             <a:avLst/>
@@ -3916,18 +3916,18 @@
             <a:cxnLst/>
             <a:rect l="l" t="t" r="r" b="b"/>
             <a:pathLst>
-              <a:path w="3226816" h="2420112">
+              <a:path w="2785737" h="2089302">
                 <a:moveTo>
-                  <a:pt x="0" y="1210056"/>
+                  <a:pt x="0" y="1044651"/>
                 </a:moveTo>
                 <a:lnTo>
-                  <a:pt x="1613408" y="2420112"/>
+                  <a:pt x="1392868" y="2089302"/>
                 </a:lnTo>
                 <a:lnTo>
-                  <a:pt x="3226816" y="1210056"/>
+                  <a:pt x="2785737" y="1044651"/>
                 </a:lnTo>
                 <a:lnTo>
-                  <a:pt x="1613408" y="0"/>
+                  <a:pt x="1392868" y="0"/>
                 </a:lnTo>
                 <a:close/>
               </a:path>
@@ -3952,8 +3952,8 @@
         </p:nvSpPr>
         <p:spPr>
           <a:xfrm>
-            <a:off x="1616710" y="3575304"/>
-            <a:ext cx="3226816" cy="0"/>
+            <a:off x="1837250" y="3575304"/>
+            <a:ext cx="2785737" cy="0"/>
           </a:xfrm>
           <a:prstGeom prst="line">
             <a:avLst/>
@@ -3975,8 +3975,8 @@
         </p:nvSpPr>
         <p:spPr>
           <a:xfrm flipV="1">
-            <a:off x="3230118" y="2365248"/>
-            <a:ext cx="0" cy="2420112"/>
+            <a:off x="3230118" y="2530653"/>
+            <a:ext cx="0" cy="2089302"/>
           </a:xfrm>
           <a:prstGeom prst="line">
             <a:avLst/>
@@ -3998,7 +3998,7 @@
         </p:nvSpPr>
         <p:spPr>
           <a:xfrm>
-            <a:off x="1786169" y="4346351"/>
+            <a:off x="1896439" y="4263649"/>
             <a:ext cx="763524" cy="349250"/>
           </a:xfrm>
           <a:prstGeom prst="rect">
@@ -4037,7 +4037,7 @@
         </p:nvSpPr>
         <p:spPr>
           <a:xfrm>
-            <a:off x="2445004" y="3804031"/>
+            <a:off x="2500139" y="3748896"/>
             <a:ext cx="763524" cy="349250"/>
           </a:xfrm>
           <a:prstGeom prst="rect">
@@ -4076,7 +4076,7 @@
         </p:nvSpPr>
         <p:spPr>
           <a:xfrm>
-            <a:off x="3251708" y="2997327"/>
+            <a:off x="3196573" y="3052462"/>
             <a:ext cx="763524" cy="349250"/>
           </a:xfrm>
           <a:prstGeom prst="rect">
@@ -4907,8 +4907,8 @@
         </p:nvSpPr>
         <p:spPr>
           <a:xfrm>
-            <a:off x="2119122" y="2346960"/>
-            <a:ext cx="3017520" cy="1341120"/>
+            <a:off x="2360524" y="2454250"/>
+            <a:ext cx="2534717" cy="1126541"/>
           </a:xfrm>
           <a:custGeom>
             <a:avLst/>
@@ -4917,18 +4917,18 @@
             <a:cxnLst/>
             <a:rect l="l" t="t" r="r" b="b"/>
             <a:pathLst>
-              <a:path w="3017520" h="1341120">
+              <a:path w="2534717" h="1126541">
                 <a:moveTo>
-                  <a:pt x="0" y="1341120"/>
+                  <a:pt x="0" y="1126541"/>
                 </a:moveTo>
                 <a:lnTo>
-                  <a:pt x="3017520" y="1341120"/>
+                  <a:pt x="2534717" y="1126541"/>
                 </a:lnTo>
                 <a:lnTo>
-                  <a:pt x="2346960" y="0"/>
+                  <a:pt x="1971446" y="0"/>
                 </a:lnTo>
                 <a:lnTo>
-                  <a:pt x="670560" y="0"/>
+                  <a:pt x="563270" y="0"/>
                 </a:lnTo>
                 <a:close/>
               </a:path>
@@ -4953,7 +4953,7 @@
         </p:nvSpPr>
         <p:spPr>
           <a:xfrm>
-            <a:off x="2789682" y="3478530"/>
+            <a:off x="2923794" y="3371240"/>
             <a:ext cx="209550" cy="209550"/>
           </a:xfrm>
           <a:custGeom>
@@ -4993,8 +4993,8 @@
         </p:nvSpPr>
         <p:spPr>
           <a:xfrm>
-            <a:off x="2789682" y="2346960"/>
-            <a:ext cx="0" cy="1341120"/>
+            <a:off x="2923794" y="2454250"/>
+            <a:ext cx="0" cy="1126541"/>
           </a:xfrm>
           <a:prstGeom prst="line">
             <a:avLst/>
@@ -5016,7 +5016,7 @@
         </p:nvSpPr>
         <p:spPr>
           <a:xfrm>
-            <a:off x="3246120" y="3764915"/>
+            <a:off x="3246120" y="3657625"/>
             <a:ext cx="763524" cy="349250"/>
           </a:xfrm>
           <a:prstGeom prst="rect">
@@ -5055,7 +5055,7 @@
         </p:nvSpPr>
         <p:spPr>
           <a:xfrm>
-            <a:off x="3246120" y="1920875"/>
+            <a:off x="3246120" y="2028165"/>
             <a:ext cx="763524" cy="349250"/>
           </a:xfrm>
           <a:prstGeom prst="rect">
@@ -5094,7 +5094,7 @@
         </p:nvSpPr>
         <p:spPr>
           <a:xfrm>
-            <a:off x="2838196" y="2842895"/>
+            <a:off x="2972308" y="2842895"/>
             <a:ext cx="763524" cy="349250"/>
           </a:xfrm>
           <a:prstGeom prst="rect">
@@ -9060,8 +9060,8 @@
         </p:nvSpPr>
         <p:spPr>
           <a:xfrm>
-            <a:off x="1353160" y="3068041"/>
-            <a:ext cx="2815438" cy="1407719"/>
+            <a:off x="1485483" y="3117662"/>
+            <a:ext cx="2616952" cy="1308476"/>
           </a:xfrm>
           <a:custGeom>
             <a:avLst/>
@@ -9070,15 +9070,15 @@
             <a:cxnLst/>
             <a:rect l="l" t="t" r="r" b="b"/>
             <a:pathLst>
-              <a:path w="2815438" h="1407719">
+              <a:path w="2616952" h="1308476">
                 <a:moveTo>
-                  <a:pt x="0" y="1407719"/>
+                  <a:pt x="0" y="1308476"/>
                 </a:moveTo>
                 <a:lnTo>
-                  <a:pt x="2815438" y="1407719"/>
+                  <a:pt x="2616952" y="1308476"/>
                 </a:lnTo>
                 <a:lnTo>
-                  <a:pt x="938479" y="0"/>
+                  <a:pt x="872317" y="0"/>
                 </a:lnTo>
                 <a:close/>
               </a:path>
@@ -9098,8 +9098,8 @@
         </p:nvSpPr>
         <p:spPr>
           <a:xfrm>
-            <a:off x="2291639" y="3068041"/>
-            <a:ext cx="2815438" cy="1407719"/>
+            <a:off x="2357801" y="3117662"/>
+            <a:ext cx="2616952" cy="1308476"/>
           </a:xfrm>
           <a:custGeom>
             <a:avLst/>
@@ -9108,12 +9108,12 @@
             <a:cxnLst/>
             <a:rect l="l" t="t" r="r" b="b"/>
             <a:pathLst>
-              <a:path w="2815438" h="1407719">
+              <a:path w="2616952" h="1308476">
                 <a:moveTo>
-                  <a:pt x="1876958" y="1407719"/>
+                  <a:pt x="1744635" y="1308476"/>
                 </a:moveTo>
                 <a:lnTo>
-                  <a:pt x="2815438" y="0"/>
+                  <a:pt x="2616952" y="0"/>
                 </a:lnTo>
                 <a:lnTo>
                   <a:pt x="0" y="0"/>
@@ -9136,8 +9136,8 @@
         </p:nvSpPr>
         <p:spPr>
           <a:xfrm flipV="1">
-            <a:off x="883920" y="2598801"/>
-            <a:ext cx="0" cy="2346198"/>
+            <a:off x="1049325" y="2681503"/>
+            <a:ext cx="0" cy="2180793"/>
           </a:xfrm>
           <a:prstGeom prst="line">
             <a:avLst/>
@@ -9159,8 +9159,8 @@
         </p:nvSpPr>
         <p:spPr>
           <a:xfrm flipV="1">
-            <a:off x="1353160" y="2598801"/>
-            <a:ext cx="0" cy="2346198"/>
+            <a:off x="1485483" y="2681503"/>
+            <a:ext cx="0" cy="2180793"/>
           </a:xfrm>
           <a:prstGeom prst="line">
             <a:avLst/>
@@ -9182,8 +9182,8 @@
         </p:nvSpPr>
         <p:spPr>
           <a:xfrm flipV="1">
-            <a:off x="1822399" y="2598801"/>
-            <a:ext cx="0" cy="2346198"/>
+            <a:off x="1921642" y="2681503"/>
+            <a:ext cx="0" cy="2180793"/>
           </a:xfrm>
           <a:prstGeom prst="line">
             <a:avLst/>
@@ -9205,8 +9205,8 @@
         </p:nvSpPr>
         <p:spPr>
           <a:xfrm flipV="1">
-            <a:off x="2291639" y="2598801"/>
-            <a:ext cx="0" cy="2346198"/>
+            <a:off x="2357801" y="2681503"/>
+            <a:ext cx="0" cy="2180793"/>
           </a:xfrm>
           <a:prstGeom prst="line">
             <a:avLst/>
@@ -9228,8 +9228,8 @@
         </p:nvSpPr>
         <p:spPr>
           <a:xfrm flipV="1">
-            <a:off x="2760878" y="2598801"/>
-            <a:ext cx="0" cy="2346198"/>
+            <a:off x="2793959" y="2681503"/>
+            <a:ext cx="0" cy="2180793"/>
           </a:xfrm>
           <a:prstGeom prst="line">
             <a:avLst/>
@@ -9251,8 +9251,8 @@
         </p:nvSpPr>
         <p:spPr>
           <a:xfrm flipV="1">
-            <a:off x="3230118" y="2598801"/>
-            <a:ext cx="0" cy="2346198"/>
+            <a:off x="3230118" y="2681503"/>
+            <a:ext cx="0" cy="2180793"/>
           </a:xfrm>
           <a:prstGeom prst="line">
             <a:avLst/>
@@ -9274,8 +9274,8 @@
         </p:nvSpPr>
         <p:spPr>
           <a:xfrm flipV="1">
-            <a:off x="3699358" y="2598801"/>
-            <a:ext cx="0" cy="2346198"/>
+            <a:off x="3666277" y="2681503"/>
+            <a:ext cx="0" cy="2180793"/>
           </a:xfrm>
           <a:prstGeom prst="line">
             <a:avLst/>
@@ -9297,8 +9297,8 @@
         </p:nvSpPr>
         <p:spPr>
           <a:xfrm flipV="1">
-            <a:off x="4168597" y="2598801"/>
-            <a:ext cx="0" cy="2346198"/>
+            <a:off x="4102435" y="2681503"/>
+            <a:ext cx="0" cy="2180793"/>
           </a:xfrm>
           <a:prstGeom prst="line">
             <a:avLst/>
@@ -9320,8 +9320,8 @@
         </p:nvSpPr>
         <p:spPr>
           <a:xfrm flipV="1">
-            <a:off x="4637837" y="2598801"/>
-            <a:ext cx="0" cy="2346198"/>
+            <a:off x="4538594" y="2681503"/>
+            <a:ext cx="0" cy="2180793"/>
           </a:xfrm>
           <a:prstGeom prst="line">
             <a:avLst/>
@@ -9343,8 +9343,8 @@
         </p:nvSpPr>
         <p:spPr>
           <a:xfrm flipV="1">
-            <a:off x="5107076" y="2598801"/>
-            <a:ext cx="0" cy="2346198"/>
+            <a:off x="4974753" y="2681503"/>
+            <a:ext cx="0" cy="2180793"/>
           </a:xfrm>
           <a:prstGeom prst="line">
             <a:avLst/>
@@ -9366,8 +9366,8 @@
         </p:nvSpPr>
         <p:spPr>
           <a:xfrm flipV="1">
-            <a:off x="5576316" y="2598801"/>
-            <a:ext cx="0" cy="2346198"/>
+            <a:off x="5410911" y="2681503"/>
+            <a:ext cx="0" cy="2180793"/>
           </a:xfrm>
           <a:prstGeom prst="line">
             <a:avLst/>
@@ -9389,8 +9389,8 @@
         </p:nvSpPr>
         <p:spPr>
           <a:xfrm>
-            <a:off x="883920" y="4944999"/>
-            <a:ext cx="4692396" cy="0"/>
+            <a:off x="1049325" y="4862297"/>
+            <a:ext cx="4361586" cy="0"/>
           </a:xfrm>
           <a:prstGeom prst="line">
             <a:avLst/>
@@ -9412,8 +9412,8 @@
         </p:nvSpPr>
         <p:spPr>
           <a:xfrm>
-            <a:off x="883920" y="4475759"/>
-            <a:ext cx="4692396" cy="0"/>
+            <a:off x="1049325" y="4426138"/>
+            <a:ext cx="4361586" cy="0"/>
           </a:xfrm>
           <a:prstGeom prst="line">
             <a:avLst/>
@@ -9435,8 +9435,8 @@
         </p:nvSpPr>
         <p:spPr>
           <a:xfrm>
-            <a:off x="883920" y="4006520"/>
-            <a:ext cx="4692396" cy="0"/>
+            <a:off x="1049325" y="3989979"/>
+            <a:ext cx="4361586" cy="0"/>
           </a:xfrm>
           <a:prstGeom prst="line">
             <a:avLst/>
@@ -9458,8 +9458,8 @@
         </p:nvSpPr>
         <p:spPr>
           <a:xfrm>
-            <a:off x="883920" y="3537280"/>
-            <a:ext cx="4692396" cy="0"/>
+            <a:off x="1049325" y="3553821"/>
+            <a:ext cx="4361586" cy="0"/>
           </a:xfrm>
           <a:prstGeom prst="line">
             <a:avLst/>
@@ -9481,8 +9481,8 @@
         </p:nvSpPr>
         <p:spPr>
           <a:xfrm>
-            <a:off x="883920" y="3068041"/>
-            <a:ext cx="4692396" cy="0"/>
+            <a:off x="1049325" y="3117662"/>
+            <a:ext cx="4361586" cy="0"/>
           </a:xfrm>
           <a:prstGeom prst="line">
             <a:avLst/>
@@ -9504,8 +9504,8 @@
         </p:nvSpPr>
         <p:spPr>
           <a:xfrm>
-            <a:off x="883920" y="2598801"/>
-            <a:ext cx="4692396" cy="0"/>
+            <a:off x="1049325" y="2681503"/>
+            <a:ext cx="4361586" cy="0"/>
           </a:xfrm>
           <a:prstGeom prst="line">
             <a:avLst/>
@@ -9527,8 +9527,8 @@
         </p:nvSpPr>
         <p:spPr>
           <a:xfrm>
-            <a:off x="1353160" y="3068041"/>
-            <a:ext cx="2815438" cy="1407719"/>
+            <a:off x="1485483" y="3117662"/>
+            <a:ext cx="2616952" cy="1308476"/>
           </a:xfrm>
           <a:custGeom>
             <a:avLst/>
@@ -9537,15 +9537,15 @@
             <a:cxnLst/>
             <a:rect l="l" t="t" r="r" b="b"/>
             <a:pathLst>
-              <a:path w="2815438" h="1407719">
+              <a:path w="2616952" h="1308476">
                 <a:moveTo>
-                  <a:pt x="0" y="1407719"/>
+                  <a:pt x="0" y="1308476"/>
                 </a:moveTo>
                 <a:lnTo>
-                  <a:pt x="2815438" y="1407719"/>
+                  <a:pt x="2616952" y="1308476"/>
                 </a:lnTo>
                 <a:lnTo>
-                  <a:pt x="938479" y="0"/>
+                  <a:pt x="872317" y="0"/>
                 </a:lnTo>
                 <a:close/>
               </a:path>
@@ -9568,8 +9568,8 @@
         </p:nvSpPr>
         <p:spPr>
           <a:xfrm>
-            <a:off x="2291639" y="3068041"/>
-            <a:ext cx="2815438" cy="1407719"/>
+            <a:off x="2357801" y="3117662"/>
+            <a:ext cx="2616952" cy="1308476"/>
           </a:xfrm>
           <a:custGeom>
             <a:avLst/>
@@ -9578,12 +9578,12 @@
             <a:cxnLst/>
             <a:rect l="l" t="t" r="r" b="b"/>
             <a:pathLst>
-              <a:path w="2815438" h="1407719">
+              <a:path w="2616952" h="1308476">
                 <a:moveTo>
-                  <a:pt x="1876958" y="1407719"/>
+                  <a:pt x="1744635" y="1308476"/>
                 </a:moveTo>
                 <a:lnTo>
-                  <a:pt x="2815438" y="0"/>
+                  <a:pt x="2616952" y="0"/>
                 </a:lnTo>
                 <a:lnTo>
                   <a:pt x="0" y="0"/>
@@ -9609,7 +9609,7 @@
         </p:nvSpPr>
         <p:spPr>
           <a:xfrm>
-            <a:off x="2291639" y="4266209"/>
+            <a:off x="2357801" y="4216588"/>
             <a:ext cx="209550" cy="209550"/>
           </a:xfrm>
           <a:custGeom>
@@ -9649,8 +9649,8 @@
         </p:nvSpPr>
         <p:spPr>
           <a:xfrm>
-            <a:off x="2291639" y="3068041"/>
-            <a:ext cx="0" cy="1407719"/>
+            <a:off x="2357801" y="3117662"/>
+            <a:ext cx="0" cy="1308476"/>
           </a:xfrm>
           <a:prstGeom prst="line">
             <a:avLst/>
@@ -9672,7 +9672,7 @@
         </p:nvSpPr>
         <p:spPr>
           <a:xfrm>
-            <a:off x="2379116" y="4552594"/>
+            <a:off x="2412197" y="4502973"/>
             <a:ext cx="763524" cy="349250"/>
           </a:xfrm>
           <a:prstGeom prst="rect">
@@ -9711,7 +9711,7 @@
         </p:nvSpPr>
         <p:spPr>
           <a:xfrm>
-            <a:off x="2340153" y="3597275"/>
+            <a:off x="2406315" y="3597275"/>
             <a:ext cx="763524" cy="349250"/>
           </a:xfrm>
           <a:prstGeom prst="rect">
@@ -10237,8 +10237,8 @@
         </p:nvSpPr>
         <p:spPr>
           <a:xfrm>
-            <a:off x="1842668" y="3397910"/>
-            <a:ext cx="2774899" cy="1040587"/>
+            <a:off x="2107316" y="3497153"/>
+            <a:ext cx="2245604" cy="842101"/>
           </a:xfrm>
           <a:custGeom>
             <a:avLst/>
@@ -10247,18 +10247,18 @@
             <a:cxnLst/>
             <a:rect l="l" t="t" r="r" b="b"/>
             <a:pathLst>
-              <a:path w="2774899" h="1040587">
+              <a:path w="2245604" h="842101">
                 <a:moveTo>
-                  <a:pt x="0" y="1040587"/>
+                  <a:pt x="0" y="842101"/>
                 </a:moveTo>
                 <a:lnTo>
-                  <a:pt x="2081174" y="1040587"/>
+                  <a:pt x="1684203" y="842101"/>
                 </a:lnTo>
                 <a:lnTo>
-                  <a:pt x="2774899" y="0"/>
+                  <a:pt x="2245604" y="0"/>
                 </a:lnTo>
                 <a:lnTo>
-                  <a:pt x="693725" y="0"/>
+                  <a:pt x="561401" y="0"/>
                 </a:lnTo>
                 <a:close/>
               </a:path>
@@ -10278,8 +10278,8 @@
         </p:nvSpPr>
         <p:spPr>
           <a:xfrm flipV="1">
-            <a:off x="1495806" y="3051048"/>
-            <a:ext cx="0" cy="1734312"/>
+            <a:off x="1826616" y="3216453"/>
+            <a:ext cx="0" cy="1403502"/>
           </a:xfrm>
           <a:prstGeom prst="line">
             <a:avLst/>
@@ -10301,8 +10301,8 @@
         </p:nvSpPr>
         <p:spPr>
           <a:xfrm flipV="1">
-            <a:off x="1842668" y="3051048"/>
-            <a:ext cx="0" cy="1734312"/>
+            <a:off x="2107316" y="3216453"/>
+            <a:ext cx="0" cy="1403502"/>
           </a:xfrm>
           <a:prstGeom prst="line">
             <a:avLst/>
@@ -10324,8 +10324,8 @@
         </p:nvSpPr>
         <p:spPr>
           <a:xfrm flipV="1">
-            <a:off x="2189531" y="3051048"/>
-            <a:ext cx="0" cy="1734312"/>
+            <a:off x="2388017" y="3216453"/>
+            <a:ext cx="0" cy="1403502"/>
           </a:xfrm>
           <a:prstGeom prst="line">
             <a:avLst/>
@@ -10347,8 +10347,8 @@
         </p:nvSpPr>
         <p:spPr>
           <a:xfrm flipV="1">
-            <a:off x="2536393" y="3051048"/>
-            <a:ext cx="0" cy="1734312"/>
+            <a:off x="2668717" y="3216453"/>
+            <a:ext cx="0" cy="1403502"/>
           </a:xfrm>
           <a:prstGeom prst="line">
             <a:avLst/>
@@ -10370,8 +10370,8 @@
         </p:nvSpPr>
         <p:spPr>
           <a:xfrm flipV="1">
-            <a:off x="2883256" y="3051048"/>
-            <a:ext cx="0" cy="1734312"/>
+            <a:off x="2949418" y="3216453"/>
+            <a:ext cx="0" cy="1403502"/>
           </a:xfrm>
           <a:prstGeom prst="line">
             <a:avLst/>
@@ -10393,8 +10393,8 @@
         </p:nvSpPr>
         <p:spPr>
           <a:xfrm flipV="1">
-            <a:off x="3230118" y="3051048"/>
-            <a:ext cx="0" cy="1734312"/>
+            <a:off x="3230118" y="3216453"/>
+            <a:ext cx="0" cy="1403502"/>
           </a:xfrm>
           <a:prstGeom prst="line">
             <a:avLst/>
@@ -10416,8 +10416,8 @@
         </p:nvSpPr>
         <p:spPr>
           <a:xfrm flipV="1">
-            <a:off x="3576980" y="3051048"/>
-            <a:ext cx="0" cy="1734312"/>
+            <a:off x="3510818" y="3216453"/>
+            <a:ext cx="0" cy="1403502"/>
           </a:xfrm>
           <a:prstGeom prst="line">
             <a:avLst/>
@@ -10439,8 +10439,8 @@
         </p:nvSpPr>
         <p:spPr>
           <a:xfrm flipV="1">
-            <a:off x="3923843" y="3051048"/>
-            <a:ext cx="0" cy="1734312"/>
+            <a:off x="3791519" y="3216453"/>
+            <a:ext cx="0" cy="1403502"/>
           </a:xfrm>
           <a:prstGeom prst="line">
             <a:avLst/>
@@ -10462,8 +10462,8 @@
         </p:nvSpPr>
         <p:spPr>
           <a:xfrm flipV="1">
-            <a:off x="4270705" y="3051048"/>
-            <a:ext cx="0" cy="1734312"/>
+            <a:off x="4072219" y="3216453"/>
+            <a:ext cx="0" cy="1403502"/>
           </a:xfrm>
           <a:prstGeom prst="line">
             <a:avLst/>
@@ -10485,8 +10485,8 @@
         </p:nvSpPr>
         <p:spPr>
           <a:xfrm flipV="1">
-            <a:off x="4617568" y="3051048"/>
-            <a:ext cx="0" cy="1734312"/>
+            <a:off x="4352920" y="3216453"/>
+            <a:ext cx="0" cy="1403502"/>
           </a:xfrm>
           <a:prstGeom prst="line">
             <a:avLst/>
@@ -10508,8 +10508,8 @@
         </p:nvSpPr>
         <p:spPr>
           <a:xfrm flipV="1">
-            <a:off x="4964430" y="3051048"/>
-            <a:ext cx="0" cy="1734312"/>
+            <a:off x="4633620" y="3216453"/>
+            <a:ext cx="0" cy="1403502"/>
           </a:xfrm>
           <a:prstGeom prst="line">
             <a:avLst/>
@@ -10531,8 +10531,8 @@
         </p:nvSpPr>
         <p:spPr>
           <a:xfrm>
-            <a:off x="1495806" y="4785360"/>
-            <a:ext cx="3468624" cy="0"/>
+            <a:off x="1826616" y="4619955"/>
+            <a:ext cx="2807005" cy="0"/>
           </a:xfrm>
           <a:prstGeom prst="line">
             <a:avLst/>
@@ -10554,8 +10554,8 @@
         </p:nvSpPr>
         <p:spPr>
           <a:xfrm>
-            <a:off x="1495806" y="4438498"/>
-            <a:ext cx="3468624" cy="0"/>
+            <a:off x="1826616" y="4339255"/>
+            <a:ext cx="2807005" cy="0"/>
           </a:xfrm>
           <a:prstGeom prst="line">
             <a:avLst/>
@@ -10577,8 +10577,8 @@
         </p:nvSpPr>
         <p:spPr>
           <a:xfrm>
-            <a:off x="1495806" y="4091635"/>
-            <a:ext cx="3468624" cy="0"/>
+            <a:off x="1826616" y="4058554"/>
+            <a:ext cx="2807005" cy="0"/>
           </a:xfrm>
           <a:prstGeom prst="line">
             <a:avLst/>
@@ -10600,8 +10600,8 @@
         </p:nvSpPr>
         <p:spPr>
           <a:xfrm>
-            <a:off x="1495806" y="3744773"/>
-            <a:ext cx="3468624" cy="0"/>
+            <a:off x="1826616" y="3777854"/>
+            <a:ext cx="2807005" cy="0"/>
           </a:xfrm>
           <a:prstGeom prst="line">
             <a:avLst/>
@@ -10623,8 +10623,8 @@
         </p:nvSpPr>
         <p:spPr>
           <a:xfrm>
-            <a:off x="1495806" y="3397910"/>
-            <a:ext cx="3468624" cy="0"/>
+            <a:off x="1826616" y="3497153"/>
+            <a:ext cx="2807005" cy="0"/>
           </a:xfrm>
           <a:prstGeom prst="line">
             <a:avLst/>
@@ -10646,8 +10646,8 @@
         </p:nvSpPr>
         <p:spPr>
           <a:xfrm>
-            <a:off x="1495806" y="3051048"/>
-            <a:ext cx="3468624" cy="0"/>
+            <a:off x="1826616" y="3216453"/>
+            <a:ext cx="2807005" cy="0"/>
           </a:xfrm>
           <a:prstGeom prst="line">
             <a:avLst/>
@@ -10669,8 +10669,8 @@
         </p:nvSpPr>
         <p:spPr>
           <a:xfrm>
-            <a:off x="1842668" y="3397910"/>
-            <a:ext cx="2774899" cy="1040587"/>
+            <a:off x="2107316" y="3497153"/>
+            <a:ext cx="2245604" cy="842101"/>
           </a:xfrm>
           <a:custGeom>
             <a:avLst/>
@@ -10679,18 +10679,18 @@
             <a:cxnLst/>
             <a:rect l="l" t="t" r="r" b="b"/>
             <a:pathLst>
-              <a:path w="2774899" h="1040587">
+              <a:path w="2245604" h="842101">
                 <a:moveTo>
-                  <a:pt x="0" y="1040587"/>
+                  <a:pt x="0" y="842101"/>
                 </a:moveTo>
                 <a:lnTo>
-                  <a:pt x="2081174" y="1040587"/>
+                  <a:pt x="1684203" y="842101"/>
                 </a:lnTo>
                 <a:lnTo>
-                  <a:pt x="2774899" y="0"/>
+                  <a:pt x="2245604" y="0"/>
                 </a:lnTo>
                 <a:lnTo>
-                  <a:pt x="693725" y="0"/>
+                  <a:pt x="561401" y="0"/>
                 </a:lnTo>
                 <a:close/>
               </a:path>
@@ -10713,7 +10713,7 @@
         </p:nvSpPr>
         <p:spPr>
           <a:xfrm>
-            <a:off x="2536393" y="4228948"/>
+            <a:off x="2668717" y="4129705"/>
             <a:ext cx="209550" cy="209550"/>
           </a:xfrm>
           <a:custGeom>
@@ -10753,8 +10753,8 @@
         </p:nvSpPr>
         <p:spPr>
           <a:xfrm>
-            <a:off x="2536393" y="3397910"/>
-            <a:ext cx="0" cy="1040587"/>
+            <a:off x="2668717" y="3497153"/>
+            <a:ext cx="0" cy="842101"/>
           </a:xfrm>
           <a:prstGeom prst="line">
             <a:avLst/>
@@ -10776,7 +10776,7 @@
         </p:nvSpPr>
         <p:spPr>
           <a:xfrm>
-            <a:off x="2501494" y="4515333"/>
+            <a:off x="2567656" y="4416090"/>
             <a:ext cx="763524" cy="349250"/>
           </a:xfrm>
           <a:prstGeom prst="rect">
@@ -10815,7 +10815,7 @@
         </p:nvSpPr>
         <p:spPr>
           <a:xfrm>
-            <a:off x="2584907" y="3743579"/>
+            <a:off x="2717231" y="3743579"/>
             <a:ext cx="763524" cy="349250"/>
           </a:xfrm>
           <a:prstGeom prst="rect">
@@ -10901,8 +10901,8 @@
         </p:nvSpPr>
         <p:spPr>
           <a:xfrm>
-            <a:off x="8091678" y="3340100"/>
-            <a:ext cx="1734312" cy="1156208"/>
+            <a:off x="8257083" y="3450370"/>
+            <a:ext cx="1403502" cy="935668"/>
           </a:xfrm>
           <a:custGeom>
             <a:avLst/>
@@ -10911,12 +10911,12 @@
             <a:cxnLst/>
             <a:rect l="l" t="t" r="r" b="b"/>
             <a:pathLst>
-              <a:path w="1734312" h="1156208">
+              <a:path w="1403502" h="935668">
                 <a:moveTo>
-                  <a:pt x="0" y="1156208"/>
+                  <a:pt x="0" y="935668"/>
                 </a:moveTo>
                 <a:lnTo>
-                  <a:pt x="1734312" y="1156208"/>
+                  <a:pt x="1403502" y="935668"/>
                 </a:lnTo>
                 <a:lnTo>
                   <a:pt x="0" y="0"/>
@@ -10939,8 +10939,8 @@
         </p:nvSpPr>
         <p:spPr>
           <a:xfrm flipV="1">
-            <a:off x="7802626" y="3051048"/>
-            <a:ext cx="0" cy="1734312"/>
+            <a:off x="8023166" y="3216453"/>
+            <a:ext cx="0" cy="1403502"/>
           </a:xfrm>
           <a:prstGeom prst="line">
             <a:avLst/>
@@ -10962,8 +10962,8 @@
         </p:nvSpPr>
         <p:spPr>
           <a:xfrm flipV="1">
-            <a:off x="8091678" y="3051048"/>
-            <a:ext cx="0" cy="1734312"/>
+            <a:off x="8257083" y="3216453"/>
+            <a:ext cx="0" cy="1403502"/>
           </a:xfrm>
           <a:prstGeom prst="line">
             <a:avLst/>
@@ -10985,8 +10985,8 @@
         </p:nvSpPr>
         <p:spPr>
           <a:xfrm flipV="1">
-            <a:off x="8380730" y="3051048"/>
-            <a:ext cx="0" cy="1734312"/>
+            <a:off x="8491000" y="3216453"/>
+            <a:ext cx="0" cy="1403502"/>
           </a:xfrm>
           <a:prstGeom prst="line">
             <a:avLst/>
@@ -11008,8 +11008,8 @@
         </p:nvSpPr>
         <p:spPr>
           <a:xfrm flipV="1">
-            <a:off x="8669782" y="3051048"/>
-            <a:ext cx="0" cy="1734312"/>
+            <a:off x="8724917" y="3216453"/>
+            <a:ext cx="0" cy="1403502"/>
           </a:xfrm>
           <a:prstGeom prst="line">
             <a:avLst/>
@@ -11031,8 +11031,8 @@
         </p:nvSpPr>
         <p:spPr>
           <a:xfrm flipV="1">
-            <a:off x="8958834" y="3051048"/>
-            <a:ext cx="0" cy="1734312"/>
+            <a:off x="8958834" y="3216453"/>
+            <a:ext cx="0" cy="1403502"/>
           </a:xfrm>
           <a:prstGeom prst="line">
             <a:avLst/>
@@ -11054,8 +11054,8 @@
         </p:nvSpPr>
         <p:spPr>
           <a:xfrm flipV="1">
-            <a:off x="9247886" y="3051048"/>
-            <a:ext cx="0" cy="1734312"/>
+            <a:off x="9192751" y="3216453"/>
+            <a:ext cx="0" cy="1403502"/>
           </a:xfrm>
           <a:prstGeom prst="line">
             <a:avLst/>
@@ -11077,8 +11077,8 @@
         </p:nvSpPr>
         <p:spPr>
           <a:xfrm flipV="1">
-            <a:off x="9536938" y="3051048"/>
-            <a:ext cx="0" cy="1734312"/>
+            <a:off x="9426668" y="3216453"/>
+            <a:ext cx="0" cy="1403502"/>
           </a:xfrm>
           <a:prstGeom prst="line">
             <a:avLst/>
@@ -11100,8 +11100,8 @@
         </p:nvSpPr>
         <p:spPr>
           <a:xfrm flipV="1">
-            <a:off x="9825990" y="3051048"/>
-            <a:ext cx="0" cy="1734312"/>
+            <a:off x="9660585" y="3216453"/>
+            <a:ext cx="0" cy="1403502"/>
           </a:xfrm>
           <a:prstGeom prst="line">
             <a:avLst/>
@@ -11123,8 +11123,8 @@
         </p:nvSpPr>
         <p:spPr>
           <a:xfrm flipV="1">
-            <a:off x="10115042" y="3051048"/>
-            <a:ext cx="0" cy="1734312"/>
+            <a:off x="9894502" y="3216453"/>
+            <a:ext cx="0" cy="1403502"/>
           </a:xfrm>
           <a:prstGeom prst="line">
             <a:avLst/>
@@ -11146,8 +11146,8 @@
         </p:nvSpPr>
         <p:spPr>
           <a:xfrm>
-            <a:off x="7802626" y="4785360"/>
-            <a:ext cx="2312416" cy="0"/>
+            <a:off x="8023166" y="4619955"/>
+            <a:ext cx="1871337" cy="0"/>
           </a:xfrm>
           <a:prstGeom prst="line">
             <a:avLst/>
@@ -11169,8 +11169,8 @@
         </p:nvSpPr>
         <p:spPr>
           <a:xfrm>
-            <a:off x="7802626" y="4496308"/>
-            <a:ext cx="2312416" cy="0"/>
+            <a:off x="8023166" y="4386038"/>
+            <a:ext cx="1871337" cy="0"/>
           </a:xfrm>
           <a:prstGeom prst="line">
             <a:avLst/>
@@ -11192,8 +11192,8 @@
         </p:nvSpPr>
         <p:spPr>
           <a:xfrm>
-            <a:off x="7802626" y="4207256"/>
-            <a:ext cx="2312416" cy="0"/>
+            <a:off x="8023166" y="4152121"/>
+            <a:ext cx="1871337" cy="0"/>
           </a:xfrm>
           <a:prstGeom prst="line">
             <a:avLst/>
@@ -11215,8 +11215,8 @@
         </p:nvSpPr>
         <p:spPr>
           <a:xfrm>
-            <a:off x="7802626" y="3918204"/>
-            <a:ext cx="2312416" cy="0"/>
+            <a:off x="8023166" y="3918204"/>
+            <a:ext cx="1871337" cy="0"/>
           </a:xfrm>
           <a:prstGeom prst="line">
             <a:avLst/>
@@ -11238,8 +11238,8 @@
         </p:nvSpPr>
         <p:spPr>
           <a:xfrm>
-            <a:off x="7802626" y="3629152"/>
-            <a:ext cx="2312416" cy="0"/>
+            <a:off x="8023166" y="3684287"/>
+            <a:ext cx="1871337" cy="0"/>
           </a:xfrm>
           <a:prstGeom prst="line">
             <a:avLst/>
@@ -11261,8 +11261,8 @@
         </p:nvSpPr>
         <p:spPr>
           <a:xfrm>
-            <a:off x="7802626" y="3340100"/>
-            <a:ext cx="2312416" cy="0"/>
+            <a:off x="8023166" y="3450370"/>
+            <a:ext cx="1871337" cy="0"/>
           </a:xfrm>
           <a:prstGeom prst="line">
             <a:avLst/>
@@ -11284,8 +11284,8 @@
         </p:nvSpPr>
         <p:spPr>
           <a:xfrm>
-            <a:off x="7802626" y="3051048"/>
-            <a:ext cx="2312416" cy="0"/>
+            <a:off x="8023166" y="3216453"/>
+            <a:ext cx="1871337" cy="0"/>
           </a:xfrm>
           <a:prstGeom prst="line">
             <a:avLst/>
@@ -11307,8 +11307,8 @@
         </p:nvSpPr>
         <p:spPr>
           <a:xfrm>
-            <a:off x="8091678" y="3340100"/>
-            <a:ext cx="1734312" cy="1156208"/>
+            <a:off x="8257083" y="3450370"/>
+            <a:ext cx="1403502" cy="935668"/>
           </a:xfrm>
           <a:custGeom>
             <a:avLst/>
@@ -11317,12 +11317,12 @@
             <a:cxnLst/>
             <a:rect l="l" t="t" r="r" b="b"/>
             <a:pathLst>
-              <a:path w="1734312" h="1156208">
+              <a:path w="1403502" h="935668">
                 <a:moveTo>
-                  <a:pt x="0" y="1156208"/>
+                  <a:pt x="0" y="935668"/>
                 </a:moveTo>
                 <a:lnTo>
-                  <a:pt x="1734312" y="1156208"/>
+                  <a:pt x="1403502" y="935668"/>
                 </a:lnTo>
                 <a:lnTo>
                   <a:pt x="0" y="0"/>
@@ -11348,7 +11348,7 @@
         </p:nvSpPr>
         <p:spPr>
           <a:xfrm>
-            <a:off x="8091678" y="4286758"/>
+            <a:off x="8257083" y="4176488"/>
             <a:ext cx="209550" cy="209550"/>
           </a:xfrm>
           <a:custGeom>
@@ -11388,7 +11388,7 @@
         </p:nvSpPr>
         <p:spPr>
           <a:xfrm>
-            <a:off x="8577072" y="4573143"/>
+            <a:off x="8577072" y="4462873"/>
             <a:ext cx="763524" cy="349250"/>
           </a:xfrm>
           <a:prstGeom prst="rect">
@@ -11427,7 +11427,7 @@
         </p:nvSpPr>
         <p:spPr>
           <a:xfrm>
-            <a:off x="7279640" y="3743579"/>
+            <a:off x="7445045" y="3743579"/>
             <a:ext cx="763524" cy="349250"/>
           </a:xfrm>
           <a:prstGeom prst="rect">
@@ -11580,8 +11580,8 @@
         </p:nvSpPr>
         <p:spPr>
           <a:xfrm>
-            <a:off x="944118" y="1943100"/>
-            <a:ext cx="4572000" cy="3657600"/>
+            <a:off x="1100734" y="2068393"/>
+            <a:ext cx="4258767" cy="3407014"/>
           </a:xfrm>
           <a:custGeom>
             <a:avLst/>
@@ -11590,18 +11590,18 @@
             <a:cxnLst/>
             <a:rect l="l" t="t" r="r" b="b"/>
             <a:pathLst>
-              <a:path w="4572000" h="3657600">
+              <a:path w="4258767" h="3407014">
                 <a:moveTo>
-                  <a:pt x="0" y="3657600"/>
+                  <a:pt x="0" y="3407014"/>
                 </a:moveTo>
                 <a:lnTo>
-                  <a:pt x="4572000" y="3657600"/>
+                  <a:pt x="4258767" y="3407014"/>
                 </a:lnTo>
                 <a:lnTo>
-                  <a:pt x="3657600" y="0"/>
+                  <a:pt x="3407014" y="0"/>
                 </a:lnTo>
                 <a:lnTo>
-                  <a:pt x="914400" y="0"/>
+                  <a:pt x="851753" y="0"/>
                 </a:lnTo>
                 <a:close/>
               </a:path>
@@ -11626,7 +11626,7 @@
         </p:nvSpPr>
         <p:spPr>
           <a:xfrm>
-            <a:off x="2772918" y="5391150"/>
+            <a:off x="2804241" y="5265857"/>
             <a:ext cx="209550" cy="209550"/>
           </a:xfrm>
           <a:custGeom>
@@ -11666,8 +11666,8 @@
         </p:nvSpPr>
         <p:spPr>
           <a:xfrm>
-            <a:off x="2772918" y="1943100"/>
-            <a:ext cx="0" cy="3657600"/>
+            <a:off x="2804241" y="2068393"/>
+            <a:ext cx="0" cy="3407014"/>
           </a:xfrm>
           <a:prstGeom prst="line">
             <a:avLst/>
@@ -11689,7 +11689,7 @@
         </p:nvSpPr>
         <p:spPr>
           <a:xfrm>
-            <a:off x="2764536" y="5677535"/>
+            <a:off x="2764536" y="5552242"/>
             <a:ext cx="931164" cy="349250"/>
           </a:xfrm>
           <a:prstGeom prst="rect">
@@ -11728,7 +11728,7 @@
         </p:nvSpPr>
         <p:spPr>
           <a:xfrm>
-            <a:off x="2901442" y="1517015"/>
+            <a:off x="2901442" y="1642308"/>
             <a:ext cx="657352" cy="349250"/>
           </a:xfrm>
           <a:prstGeom prst="rect">
@@ -11767,7 +11767,7 @@
         </p:nvSpPr>
         <p:spPr>
           <a:xfrm>
-            <a:off x="2801874" y="3597275"/>
+            <a:off x="2833197" y="3597275"/>
             <a:ext cx="657352" cy="349250"/>
           </a:xfrm>
           <a:prstGeom prst="rect">
@@ -12138,8 +12138,8 @@
         </p:nvSpPr>
         <p:spPr>
           <a:xfrm>
-            <a:off x="7039217" y="2918737"/>
-            <a:ext cx="2132907" cy="1706326"/>
+            <a:off x="7174549" y="2978884"/>
+            <a:ext cx="1982539" cy="1586031"/>
           </a:xfrm>
           <a:custGeom>
             <a:avLst/>
@@ -12148,18 +12148,18 @@
             <a:cxnLst/>
             <a:rect l="l" t="t" r="r" b="b"/>
             <a:pathLst>
-              <a:path w="2132907" h="1706326">
+              <a:path w="1982539" h="1586031">
                 <a:moveTo>
-                  <a:pt x="0" y="1706326"/>
+                  <a:pt x="0" y="1586031"/>
                 </a:moveTo>
                 <a:lnTo>
-                  <a:pt x="2132907" y="1706326"/>
+                  <a:pt x="1982539" y="1586031"/>
                 </a:lnTo>
                 <a:lnTo>
-                  <a:pt x="1706326" y="0"/>
+                  <a:pt x="1586031" y="0"/>
                 </a:lnTo>
                 <a:lnTo>
-                  <a:pt x="426581" y="0"/>
+                  <a:pt x="396508" y="0"/>
                 </a:lnTo>
                 <a:close/>
               </a:path>
@@ -12179,8 +12179,8 @@
         </p:nvSpPr>
         <p:spPr>
           <a:xfrm>
-            <a:off x="8745543" y="2918737"/>
-            <a:ext cx="2132907" cy="1706326"/>
+            <a:off x="8760580" y="2978884"/>
+            <a:ext cx="1982539" cy="1586031"/>
           </a:xfrm>
           <a:custGeom>
             <a:avLst/>
@@ -12189,15 +12189,15 @@
             <a:cxnLst/>
             <a:rect l="l" t="t" r="r" b="b"/>
             <a:pathLst>
-              <a:path w="2132907" h="1706326">
+              <a:path w="1982539" h="1586031">
                 <a:moveTo>
-                  <a:pt x="426581" y="1706326"/>
+                  <a:pt x="396508" y="1586031"/>
                 </a:moveTo>
                 <a:lnTo>
-                  <a:pt x="1706326" y="1706326"/>
+                  <a:pt x="1586031" y="1586031"/>
                 </a:lnTo>
                 <a:lnTo>
-                  <a:pt x="2132907" y="0"/>
+                  <a:pt x="1982539" y="0"/>
                 </a:lnTo>
                 <a:lnTo>
                   <a:pt x="0" y="0"/>
@@ -12220,8 +12220,8 @@
         </p:nvSpPr>
         <p:spPr>
           <a:xfrm flipV="1">
-            <a:off x="6612636" y="2492156"/>
-            <a:ext cx="0" cy="2559489"/>
+            <a:off x="6778041" y="2582376"/>
+            <a:ext cx="0" cy="2379047"/>
           </a:xfrm>
           <a:prstGeom prst="line">
             <a:avLst/>
@@ -12243,8 +12243,8 @@
         </p:nvSpPr>
         <p:spPr>
           <a:xfrm flipV="1">
-            <a:off x="7039217" y="2492156"/>
-            <a:ext cx="0" cy="2559489"/>
+            <a:off x="7174549" y="2582376"/>
+            <a:ext cx="0" cy="2379047"/>
           </a:xfrm>
           <a:prstGeom prst="line">
             <a:avLst/>
@@ -12266,8 +12266,8 @@
         </p:nvSpPr>
         <p:spPr>
           <a:xfrm flipV="1">
-            <a:off x="7465799" y="2492156"/>
-            <a:ext cx="0" cy="2559489"/>
+            <a:off x="7571057" y="2582376"/>
+            <a:ext cx="0" cy="2379047"/>
           </a:xfrm>
           <a:prstGeom prst="line">
             <a:avLst/>
@@ -12289,8 +12289,8 @@
         </p:nvSpPr>
         <p:spPr>
           <a:xfrm flipV="1">
-            <a:off x="7892380" y="2492156"/>
-            <a:ext cx="0" cy="2559489"/>
+            <a:off x="7967564" y="2582376"/>
+            <a:ext cx="0" cy="2379047"/>
           </a:xfrm>
           <a:prstGeom prst="line">
             <a:avLst/>
@@ -12312,8 +12312,8 @@
         </p:nvSpPr>
         <p:spPr>
           <a:xfrm flipV="1">
-            <a:off x="8318962" y="2492156"/>
-            <a:ext cx="0" cy="2559489"/>
+            <a:off x="8364072" y="2582376"/>
+            <a:ext cx="0" cy="2379047"/>
           </a:xfrm>
           <a:prstGeom prst="line">
             <a:avLst/>
@@ -12335,8 +12335,8 @@
         </p:nvSpPr>
         <p:spPr>
           <a:xfrm flipV="1">
-            <a:off x="8745543" y="2492156"/>
-            <a:ext cx="0" cy="2559489"/>
+            <a:off x="8760580" y="2582376"/>
+            <a:ext cx="0" cy="2379047"/>
           </a:xfrm>
           <a:prstGeom prst="line">
             <a:avLst/>
@@ -12358,8 +12358,8 @@
         </p:nvSpPr>
         <p:spPr>
           <a:xfrm flipV="1">
-            <a:off x="9172125" y="2492156"/>
-            <a:ext cx="0" cy="2559489"/>
+            <a:off x="9157088" y="2582376"/>
+            <a:ext cx="0" cy="2379047"/>
           </a:xfrm>
           <a:prstGeom prst="line">
             <a:avLst/>
@@ -12381,8 +12381,8 @@
         </p:nvSpPr>
         <p:spPr>
           <a:xfrm flipV="1">
-            <a:off x="9598706" y="2492156"/>
-            <a:ext cx="0" cy="2559489"/>
+            <a:off x="9553596" y="2582376"/>
+            <a:ext cx="0" cy="2379047"/>
           </a:xfrm>
           <a:prstGeom prst="line">
             <a:avLst/>
@@ -12404,8 +12404,8 @@
         </p:nvSpPr>
         <p:spPr>
           <a:xfrm flipV="1">
-            <a:off x="10025288" y="2492156"/>
-            <a:ext cx="0" cy="2559489"/>
+            <a:off x="9950104" y="2582376"/>
+            <a:ext cx="0" cy="2379047"/>
           </a:xfrm>
           <a:prstGeom prst="line">
             <a:avLst/>
@@ -12427,8 +12427,8 @@
         </p:nvSpPr>
         <p:spPr>
           <a:xfrm flipV="1">
-            <a:off x="10451869" y="2492156"/>
-            <a:ext cx="0" cy="2559489"/>
+            <a:off x="10346611" y="2582376"/>
+            <a:ext cx="0" cy="2379047"/>
           </a:xfrm>
           <a:prstGeom prst="line">
             <a:avLst/>
@@ -12450,8 +12450,8 @@
         </p:nvSpPr>
         <p:spPr>
           <a:xfrm flipV="1">
-            <a:off x="10878451" y="2492156"/>
-            <a:ext cx="0" cy="2559489"/>
+            <a:off x="10743119" y="2582376"/>
+            <a:ext cx="0" cy="2379047"/>
           </a:xfrm>
           <a:prstGeom prst="line">
             <a:avLst/>
@@ -12473,8 +12473,8 @@
         </p:nvSpPr>
         <p:spPr>
           <a:xfrm flipV="1">
-            <a:off x="11305032" y="2492156"/>
-            <a:ext cx="0" cy="2559489"/>
+            <a:off x="11139627" y="2582376"/>
+            <a:ext cx="0" cy="2379047"/>
           </a:xfrm>
           <a:prstGeom prst="line">
             <a:avLst/>
@@ -12496,8 +12496,8 @@
         </p:nvSpPr>
         <p:spPr>
           <a:xfrm>
-            <a:off x="6612636" y="5051644"/>
-            <a:ext cx="4692396" cy="0"/>
+            <a:off x="6778041" y="4961424"/>
+            <a:ext cx="4361586" cy="0"/>
           </a:xfrm>
           <a:prstGeom prst="line">
             <a:avLst/>
@@ -12519,8 +12519,8 @@
         </p:nvSpPr>
         <p:spPr>
           <a:xfrm>
-            <a:off x="6612636" y="4625063"/>
-            <a:ext cx="4692396" cy="0"/>
+            <a:off x="6778041" y="4564916"/>
+            <a:ext cx="4361586" cy="0"/>
           </a:xfrm>
           <a:prstGeom prst="line">
             <a:avLst/>
@@ -12542,8 +12542,8 @@
         </p:nvSpPr>
         <p:spPr>
           <a:xfrm>
-            <a:off x="6612636" y="4198481"/>
-            <a:ext cx="4692396" cy="0"/>
+            <a:off x="6778041" y="4168408"/>
+            <a:ext cx="4361586" cy="0"/>
           </a:xfrm>
           <a:prstGeom prst="line">
             <a:avLst/>
@@ -12565,8 +12565,8 @@
         </p:nvSpPr>
         <p:spPr>
           <a:xfrm>
-            <a:off x="6612636" y="3771900"/>
-            <a:ext cx="4692396" cy="0"/>
+            <a:off x="6778041" y="3771900"/>
+            <a:ext cx="4361586" cy="0"/>
           </a:xfrm>
           <a:prstGeom prst="line">
             <a:avLst/>
@@ -12588,8 +12588,8 @@
         </p:nvSpPr>
         <p:spPr>
           <a:xfrm>
-            <a:off x="6612636" y="3345319"/>
-            <a:ext cx="4692396" cy="0"/>
+            <a:off x="6778041" y="3375392"/>
+            <a:ext cx="4361586" cy="0"/>
           </a:xfrm>
           <a:prstGeom prst="line">
             <a:avLst/>
@@ -12611,8 +12611,8 @@
         </p:nvSpPr>
         <p:spPr>
           <a:xfrm>
-            <a:off x="6612636" y="2918737"/>
-            <a:ext cx="4692396" cy="0"/>
+            <a:off x="6778041" y="2978884"/>
+            <a:ext cx="4361586" cy="0"/>
           </a:xfrm>
           <a:prstGeom prst="line">
             <a:avLst/>
@@ -12634,8 +12634,8 @@
         </p:nvSpPr>
         <p:spPr>
           <a:xfrm>
-            <a:off x="6612636" y="2492156"/>
-            <a:ext cx="4692396" cy="0"/>
+            <a:off x="6778041" y="2582376"/>
+            <a:ext cx="4361586" cy="0"/>
           </a:xfrm>
           <a:prstGeom prst="line">
             <a:avLst/>
@@ -12657,8 +12657,8 @@
         </p:nvSpPr>
         <p:spPr>
           <a:xfrm>
-            <a:off x="7039217" y="2918737"/>
-            <a:ext cx="2132907" cy="1706326"/>
+            <a:off x="7174549" y="2978884"/>
+            <a:ext cx="1982539" cy="1586031"/>
           </a:xfrm>
           <a:custGeom>
             <a:avLst/>
@@ -12667,18 +12667,18 @@
             <a:cxnLst/>
             <a:rect l="l" t="t" r="r" b="b"/>
             <a:pathLst>
-              <a:path w="2132907" h="1706326">
+              <a:path w="1982539" h="1586031">
                 <a:moveTo>
-                  <a:pt x="0" y="1706326"/>
+                  <a:pt x="0" y="1586031"/>
                 </a:moveTo>
                 <a:lnTo>
-                  <a:pt x="2132907" y="1706326"/>
+                  <a:pt x="1982539" y="1586031"/>
                 </a:lnTo>
                 <a:lnTo>
-                  <a:pt x="1706326" y="0"/>
+                  <a:pt x="1586031" y="0"/>
                 </a:lnTo>
                 <a:lnTo>
-                  <a:pt x="426581" y="0"/>
+                  <a:pt x="396508" y="0"/>
                 </a:lnTo>
                 <a:close/>
               </a:path>
@@ -12701,8 +12701,8 @@
         </p:nvSpPr>
         <p:spPr>
           <a:xfrm>
-            <a:off x="8745543" y="2918737"/>
-            <a:ext cx="2132907" cy="1706326"/>
+            <a:off x="8760580" y="2978884"/>
+            <a:ext cx="1982539" cy="1586031"/>
           </a:xfrm>
           <a:custGeom>
             <a:avLst/>
@@ -12711,15 +12711,15 @@
             <a:cxnLst/>
             <a:rect l="l" t="t" r="r" b="b"/>
             <a:pathLst>
-              <a:path w="2132907" h="1706326">
+              <a:path w="1982539" h="1586031">
                 <a:moveTo>
-                  <a:pt x="426581" y="1706326"/>
+                  <a:pt x="396508" y="1586031"/>
                 </a:moveTo>
                 <a:lnTo>
-                  <a:pt x="1706326" y="1706326"/>
+                  <a:pt x="1586031" y="1586031"/>
                 </a:lnTo>
                 <a:lnTo>
-                  <a:pt x="2132907" y="0"/>
+                  <a:pt x="1982539" y="0"/>
                 </a:lnTo>
                 <a:lnTo>
                   <a:pt x="0" y="0"/>
@@ -12745,7 +12745,7 @@
         </p:nvSpPr>
         <p:spPr>
           <a:xfrm>
-            <a:off x="7892380" y="4415513"/>
+            <a:off x="7967564" y="4355366"/>
             <a:ext cx="209550" cy="209550"/>
           </a:xfrm>
           <a:custGeom>
@@ -12785,8 +12785,8 @@
         </p:nvSpPr>
         <p:spPr>
           <a:xfrm>
-            <a:off x="7892380" y="2918737"/>
-            <a:ext cx="0" cy="1706326"/>
+            <a:off x="7967564" y="2978884"/>
+            <a:ext cx="0" cy="1586031"/>
           </a:xfrm>
           <a:prstGeom prst="line">
             <a:avLst/>
@@ -12808,7 +12808,7 @@
         </p:nvSpPr>
         <p:spPr>
           <a:xfrm>
-            <a:off x="7723909" y="4701898"/>
+            <a:off x="7784056" y="4641751"/>
             <a:ext cx="763524" cy="349250"/>
           </a:xfrm>
           <a:prstGeom prst="rect">
@@ -12847,7 +12847,7 @@
         </p:nvSpPr>
         <p:spPr>
           <a:xfrm>
-            <a:off x="7723909" y="2492652"/>
+            <a:off x="7784056" y="2552799"/>
             <a:ext cx="763524" cy="349250"/>
           </a:xfrm>
           <a:prstGeom prst="rect">
@@ -12886,7 +12886,7 @@
         </p:nvSpPr>
         <p:spPr>
           <a:xfrm>
-            <a:off x="9430235" y="4701898"/>
+            <a:off x="9370088" y="4641751"/>
             <a:ext cx="763524" cy="349250"/>
           </a:xfrm>
           <a:prstGeom prst="rect">
@@ -12925,7 +12925,7 @@
         </p:nvSpPr>
         <p:spPr>
           <a:xfrm>
-            <a:off x="9430235" y="2492652"/>
+            <a:off x="9370088" y="2552799"/>
             <a:ext cx="763524" cy="349250"/>
           </a:xfrm>
           <a:prstGeom prst="rect">
@@ -12964,7 +12964,7 @@
         </p:nvSpPr>
         <p:spPr>
           <a:xfrm>
-            <a:off x="7940894" y="3597275"/>
+            <a:off x="8016078" y="3597275"/>
             <a:ext cx="763524" cy="349250"/>
           </a:xfrm>
           <a:prstGeom prst="rect">
@@ -13590,8 +13590,8 @@
         </p:nvSpPr>
         <p:spPr>
           <a:xfrm>
-            <a:off x="7470709" y="1689531"/>
-            <a:ext cx="3834323" cy="3067458"/>
+            <a:off x="7642001" y="1826565"/>
+            <a:ext cx="3491738" cy="2793390"/>
           </a:xfrm>
           <a:custGeom>
             <a:avLst/>
@@ -13600,15 +13600,15 @@
             <a:cxnLst/>
             <a:rect l="l" t="t" r="r" b="b"/>
             <a:pathLst>
-              <a:path w="3834323" h="3067458">
+              <a:path w="3491738" h="2793390">
                 <a:moveTo>
-                  <a:pt x="0" y="3067458"/>
+                  <a:pt x="0" y="2793390"/>
                 </a:moveTo>
                 <a:lnTo>
-                  <a:pt x="3834323" y="3067458"/>
+                  <a:pt x="3491738" y="2793390"/>
                 </a:lnTo>
                 <a:lnTo>
-                  <a:pt x="766865" y="0"/>
+                  <a:pt x="698348" y="0"/>
                 </a:lnTo>
                 <a:close/>
               </a:path>
@@ -13633,8 +13633,8 @@
         </p:nvSpPr>
         <p:spPr>
           <a:xfrm>
-            <a:off x="8237574" y="1689531"/>
-            <a:ext cx="3067458" cy="3067458"/>
+            <a:off x="8340349" y="1826565"/>
+            <a:ext cx="2793390" cy="2793390"/>
           </a:xfrm>
           <a:custGeom>
             <a:avLst/>
@@ -13643,15 +13643,15 @@
             <a:cxnLst/>
             <a:rect l="l" t="t" r="r" b="b"/>
             <a:pathLst>
-              <a:path w="3067458" h="3067458">
+              <a:path w="2793390" h="2793390">
                 <a:moveTo>
                   <a:pt x="0" y="0"/>
                 </a:moveTo>
                 <a:lnTo>
-                  <a:pt x="3067458" y="3067458"/>
+                  <a:pt x="2793390" y="2793390"/>
                 </a:lnTo>
                 <a:lnTo>
-                  <a:pt x="2300594" y="0"/>
+                  <a:pt x="2095043" y="0"/>
                 </a:lnTo>
                 <a:close/>
               </a:path>
@@ -13676,7 +13676,7 @@
         </p:nvSpPr>
         <p:spPr>
           <a:xfrm>
-            <a:off x="9004438" y="4547439"/>
+            <a:off x="9038697" y="4410405"/>
             <a:ext cx="209550" cy="209550"/>
           </a:xfrm>
           <a:custGeom>
@@ -13716,8 +13716,8 @@
         </p:nvSpPr>
         <p:spPr>
           <a:xfrm>
-            <a:off x="9004438" y="1689531"/>
-            <a:ext cx="0" cy="3067458"/>
+            <a:off x="9038697" y="1826565"/>
+            <a:ext cx="0" cy="2793390"/>
           </a:xfrm>
           <a:prstGeom prst="line">
             <a:avLst/>
@@ -13739,7 +13739,7 @@
         </p:nvSpPr>
         <p:spPr>
           <a:xfrm>
-            <a:off x="9006108" y="4833824"/>
+            <a:off x="9006108" y="4696790"/>
             <a:ext cx="763524" cy="349250"/>
           </a:xfrm>
           <a:prstGeom prst="rect">
@@ -13778,7 +13778,7 @@
         </p:nvSpPr>
         <p:spPr>
           <a:xfrm>
-            <a:off x="9006108" y="1263446"/>
+            <a:off x="9006108" y="1400480"/>
             <a:ext cx="763524" cy="349250"/>
           </a:xfrm>
           <a:prstGeom prst="rect">
@@ -13817,7 +13817,7 @@
         </p:nvSpPr>
         <p:spPr>
           <a:xfrm>
-            <a:off x="8192400" y="3048635"/>
+            <a:off x="8226659" y="3048635"/>
             <a:ext cx="763524" cy="349250"/>
           </a:xfrm>
           <a:prstGeom prst="rect">
@@ -14413,8 +14413,8 @@
         </p:nvSpPr>
         <p:spPr>
           <a:xfrm>
-            <a:off x="7134013" y="3072045"/>
-            <a:ext cx="3649641" cy="2085509"/>
+            <a:off x="7262662" y="3145559"/>
+            <a:ext cx="3392345" cy="1938483"/>
           </a:xfrm>
           <a:custGeom>
             <a:avLst/>
@@ -14423,15 +14423,15 @@
             <a:cxnLst/>
             <a:rect l="l" t="t" r="r" b="b"/>
             <a:pathLst>
-              <a:path w="3649641" h="2085509">
+              <a:path w="3392345" h="1938483">
                 <a:moveTo>
-                  <a:pt x="0" y="2085509"/>
+                  <a:pt x="0" y="1938483"/>
                 </a:moveTo>
                 <a:lnTo>
-                  <a:pt x="3649641" y="2085509"/>
+                  <a:pt x="3392345" y="1938483"/>
                 </a:lnTo>
                 <a:lnTo>
-                  <a:pt x="2085509" y="0"/>
+                  <a:pt x="1938483" y="0"/>
                 </a:lnTo>
                 <a:lnTo>
                   <a:pt x="0" y="0"/>
@@ -14454,8 +14454,8 @@
         </p:nvSpPr>
         <p:spPr>
           <a:xfrm flipV="1">
-            <a:off x="6612636" y="2550668"/>
-            <a:ext cx="0" cy="3128264"/>
+            <a:off x="6778041" y="2660938"/>
+            <a:ext cx="0" cy="2907724"/>
           </a:xfrm>
           <a:prstGeom prst="line">
             <a:avLst/>
@@ -14477,8 +14477,8 @@
         </p:nvSpPr>
         <p:spPr>
           <a:xfrm flipV="1">
-            <a:off x="7134013" y="2550668"/>
-            <a:ext cx="0" cy="3128264"/>
+            <a:off x="7262662" y="2660938"/>
+            <a:ext cx="0" cy="2907724"/>
           </a:xfrm>
           <a:prstGeom prst="line">
             <a:avLst/>
@@ -14500,8 +14500,8 @@
         </p:nvSpPr>
         <p:spPr>
           <a:xfrm flipV="1">
-            <a:off x="7655391" y="2550668"/>
-            <a:ext cx="0" cy="3128264"/>
+            <a:off x="7747282" y="2660938"/>
+            <a:ext cx="0" cy="2907724"/>
           </a:xfrm>
           <a:prstGeom prst="line">
             <a:avLst/>
@@ -14523,8 +14523,8 @@
         </p:nvSpPr>
         <p:spPr>
           <a:xfrm flipV="1">
-            <a:off x="8176768" y="2550668"/>
-            <a:ext cx="0" cy="3128264"/>
+            <a:off x="8231903" y="2660938"/>
+            <a:ext cx="0" cy="2907724"/>
           </a:xfrm>
           <a:prstGeom prst="line">
             <a:avLst/>
@@ -14546,8 +14546,8 @@
         </p:nvSpPr>
         <p:spPr>
           <a:xfrm flipV="1">
-            <a:off x="8698145" y="2550668"/>
-            <a:ext cx="0" cy="3128264"/>
+            <a:off x="8716524" y="2660938"/>
+            <a:ext cx="0" cy="2907724"/>
           </a:xfrm>
           <a:prstGeom prst="line">
             <a:avLst/>
@@ -14569,8 +14569,8 @@
         </p:nvSpPr>
         <p:spPr>
           <a:xfrm flipV="1">
-            <a:off x="9219523" y="2550668"/>
-            <a:ext cx="0" cy="3128264"/>
+            <a:off x="9201144" y="2660938"/>
+            <a:ext cx="0" cy="2907724"/>
           </a:xfrm>
           <a:prstGeom prst="line">
             <a:avLst/>
@@ -14592,8 +14592,8 @@
         </p:nvSpPr>
         <p:spPr>
           <a:xfrm flipV="1">
-            <a:off x="9740900" y="2550668"/>
-            <a:ext cx="0" cy="3128264"/>
+            <a:off x="9685765" y="2660938"/>
+            <a:ext cx="0" cy="2907724"/>
           </a:xfrm>
           <a:prstGeom prst="line">
             <a:avLst/>
@@ -14615,8 +14615,8 @@
         </p:nvSpPr>
         <p:spPr>
           <a:xfrm flipV="1">
-            <a:off x="10262277" y="2550668"/>
-            <a:ext cx="0" cy="3128264"/>
+            <a:off x="10170386" y="2660938"/>
+            <a:ext cx="0" cy="2907724"/>
           </a:xfrm>
           <a:prstGeom prst="line">
             <a:avLst/>
@@ -14638,8 +14638,8 @@
         </p:nvSpPr>
         <p:spPr>
           <a:xfrm flipV="1">
-            <a:off x="10783655" y="2550668"/>
-            <a:ext cx="0" cy="3128264"/>
+            <a:off x="10655006" y="2660938"/>
+            <a:ext cx="0" cy="2907724"/>
           </a:xfrm>
           <a:prstGeom prst="line">
             <a:avLst/>
@@ -14661,8 +14661,8 @@
         </p:nvSpPr>
         <p:spPr>
           <a:xfrm flipV="1">
-            <a:off x="11305032" y="2550668"/>
-            <a:ext cx="0" cy="3128264"/>
+            <a:off x="11139627" y="2660938"/>
+            <a:ext cx="0" cy="2907724"/>
           </a:xfrm>
           <a:prstGeom prst="line">
             <a:avLst/>
@@ -14684,8 +14684,8 @@
         </p:nvSpPr>
         <p:spPr>
           <a:xfrm>
-            <a:off x="6612636" y="5678932"/>
-            <a:ext cx="4692396" cy="0"/>
+            <a:off x="6778041" y="5568662"/>
+            <a:ext cx="4361586" cy="0"/>
           </a:xfrm>
           <a:prstGeom prst="line">
             <a:avLst/>
@@ -14707,8 +14707,8 @@
         </p:nvSpPr>
         <p:spPr>
           <a:xfrm>
-            <a:off x="6612636" y="5157555"/>
-            <a:ext cx="4692396" cy="0"/>
+            <a:off x="6778041" y="5084041"/>
+            <a:ext cx="4361586" cy="0"/>
           </a:xfrm>
           <a:prstGeom prst="line">
             <a:avLst/>
@@ -14730,8 +14730,8 @@
         </p:nvSpPr>
         <p:spPr>
           <a:xfrm>
-            <a:off x="6612636" y="4636177"/>
-            <a:ext cx="4692396" cy="0"/>
+            <a:off x="6778041" y="4599421"/>
+            <a:ext cx="4361586" cy="0"/>
           </a:xfrm>
           <a:prstGeom prst="line">
             <a:avLst/>
@@ -14753,8 +14753,8 @@
         </p:nvSpPr>
         <p:spPr>
           <a:xfrm>
-            <a:off x="6612636" y="4114800"/>
-            <a:ext cx="4692396" cy="0"/>
+            <a:off x="6778041" y="4114800"/>
+            <a:ext cx="4361586" cy="0"/>
           </a:xfrm>
           <a:prstGeom prst="line">
             <a:avLst/>
@@ -14776,8 +14776,8 @@
         </p:nvSpPr>
         <p:spPr>
           <a:xfrm>
-            <a:off x="6612636" y="3593423"/>
-            <a:ext cx="4692396" cy="0"/>
+            <a:off x="6778041" y="3630179"/>
+            <a:ext cx="4361586" cy="0"/>
           </a:xfrm>
           <a:prstGeom prst="line">
             <a:avLst/>
@@ -14799,8 +14799,8 @@
         </p:nvSpPr>
         <p:spPr>
           <a:xfrm>
-            <a:off x="6612636" y="3072045"/>
-            <a:ext cx="4692396" cy="0"/>
+            <a:off x="6778041" y="3145559"/>
+            <a:ext cx="4361586" cy="0"/>
           </a:xfrm>
           <a:prstGeom prst="line">
             <a:avLst/>
@@ -14822,8 +14822,8 @@
         </p:nvSpPr>
         <p:spPr>
           <a:xfrm>
-            <a:off x="6612636" y="2550668"/>
-            <a:ext cx="4692396" cy="0"/>
+            <a:off x="6778041" y="2660938"/>
+            <a:ext cx="4361586" cy="0"/>
           </a:xfrm>
           <a:prstGeom prst="line">
             <a:avLst/>
@@ -14845,8 +14845,8 @@
         </p:nvSpPr>
         <p:spPr>
           <a:xfrm>
-            <a:off x="7134013" y="3072045"/>
-            <a:ext cx="3649641" cy="2085509"/>
+            <a:off x="7262662" y="3145559"/>
+            <a:ext cx="3392345" cy="1938483"/>
           </a:xfrm>
           <a:custGeom>
             <a:avLst/>
@@ -14855,15 +14855,15 @@
             <a:cxnLst/>
             <a:rect l="l" t="t" r="r" b="b"/>
             <a:pathLst>
-              <a:path w="3649641" h="2085509">
+              <a:path w="3392345" h="1938483">
                 <a:moveTo>
-                  <a:pt x="0" y="2085509"/>
+                  <a:pt x="0" y="1938483"/>
                 </a:moveTo>
                 <a:lnTo>
-                  <a:pt x="3649641" y="2085509"/>
+                  <a:pt x="3392345" y="1938483"/>
                 </a:lnTo>
                 <a:lnTo>
-                  <a:pt x="2085509" y="0"/>
+                  <a:pt x="1938483" y="0"/>
                 </a:lnTo>
                 <a:lnTo>
                   <a:pt x="0" y="0"/>
@@ -14889,7 +14889,7 @@
         </p:nvSpPr>
         <p:spPr>
           <a:xfrm>
-            <a:off x="7134013" y="4948005"/>
+            <a:off x="7262662" y="4874491"/>
             <a:ext cx="209550" cy="209550"/>
           </a:xfrm>
           <a:custGeom>
@@ -14929,7 +14929,7 @@
         </p:nvSpPr>
         <p:spPr>
           <a:xfrm>
-            <a:off x="8577072" y="5234390"/>
+            <a:off x="8577072" y="5160876"/>
             <a:ext cx="763524" cy="349250"/>
           </a:xfrm>
           <a:prstGeom prst="rect">
@@ -14968,7 +14968,7 @@
         </p:nvSpPr>
         <p:spPr>
           <a:xfrm>
-            <a:off x="7795006" y="2645960"/>
+            <a:off x="7850141" y="2719474"/>
             <a:ext cx="763524" cy="349250"/>
           </a:xfrm>
           <a:prstGeom prst="rect">
@@ -15007,7 +15007,7 @@
         </p:nvSpPr>
         <p:spPr>
           <a:xfrm>
-            <a:off x="6321975" y="3940175"/>
+            <a:off x="6450624" y="3940175"/>
             <a:ext cx="763524" cy="349250"/>
           </a:xfrm>
           <a:prstGeom prst="rect">
@@ -15487,8 +15487,8 @@
         </p:nvSpPr>
         <p:spPr>
           <a:xfrm>
-            <a:off x="1359256" y="2272589"/>
-            <a:ext cx="4278020" cy="1901342"/>
+            <a:off x="1494587" y="2332736"/>
+            <a:ext cx="4007358" cy="1781048"/>
           </a:xfrm>
           <a:custGeom>
             <a:avLst/>
@@ -15497,18 +15497,18 @@
             <a:cxnLst/>
             <a:rect l="l" t="t" r="r" b="b"/>
             <a:pathLst>
-              <a:path w="4278020" h="1901342">
+              <a:path w="4007358" h="1781048">
                 <a:moveTo>
-                  <a:pt x="0" y="1901342"/>
+                  <a:pt x="0" y="1781048"/>
                 </a:moveTo>
                 <a:lnTo>
-                  <a:pt x="4278020" y="1901342"/>
+                  <a:pt x="4007358" y="1781048"/>
                 </a:lnTo>
                 <a:lnTo>
-                  <a:pt x="2852014" y="0"/>
+                  <a:pt x="2671572" y="0"/>
                 </a:lnTo>
                 <a:lnTo>
-                  <a:pt x="1426007" y="0"/>
+                  <a:pt x="1335786" y="0"/>
                 </a:lnTo>
                 <a:close/>
               </a:path>
@@ -15528,8 +15528,8 @@
         </p:nvSpPr>
         <p:spPr>
           <a:xfrm flipV="1">
-            <a:off x="883920" y="1797253"/>
-            <a:ext cx="0" cy="2852014"/>
+            <a:off x="1049325" y="1887474"/>
+            <a:ext cx="0" cy="2671572"/>
           </a:xfrm>
           <a:prstGeom prst="line">
             <a:avLst/>
@@ -15551,8 +15551,8 @@
         </p:nvSpPr>
         <p:spPr>
           <a:xfrm flipV="1">
-            <a:off x="1359256" y="1797253"/>
-            <a:ext cx="0" cy="2852014"/>
+            <a:off x="1494587" y="1887474"/>
+            <a:ext cx="0" cy="2671572"/>
           </a:xfrm>
           <a:prstGeom prst="line">
             <a:avLst/>
@@ -15574,8 +15574,8 @@
         </p:nvSpPr>
         <p:spPr>
           <a:xfrm flipV="1">
-            <a:off x="1834591" y="1797253"/>
-            <a:ext cx="0" cy="2852014"/>
+            <a:off x="1939849" y="1887474"/>
+            <a:ext cx="0" cy="2671572"/>
           </a:xfrm>
           <a:prstGeom prst="line">
             <a:avLst/>
@@ -15597,8 +15597,8 @@
         </p:nvSpPr>
         <p:spPr>
           <a:xfrm flipV="1">
-            <a:off x="2309927" y="1797253"/>
-            <a:ext cx="0" cy="2852014"/>
+            <a:off x="2385111" y="1887474"/>
+            <a:ext cx="0" cy="2671572"/>
           </a:xfrm>
           <a:prstGeom prst="line">
             <a:avLst/>
@@ -15620,8 +15620,8 @@
         </p:nvSpPr>
         <p:spPr>
           <a:xfrm flipV="1">
-            <a:off x="2785262" y="1797253"/>
-            <a:ext cx="0" cy="2852014"/>
+            <a:off x="2830373" y="1887474"/>
+            <a:ext cx="0" cy="2671572"/>
           </a:xfrm>
           <a:prstGeom prst="line">
             <a:avLst/>
@@ -15643,8 +15643,8 @@
         </p:nvSpPr>
         <p:spPr>
           <a:xfrm flipV="1">
-            <a:off x="3260598" y="1797253"/>
-            <a:ext cx="0" cy="2852014"/>
+            <a:off x="3275635" y="1887474"/>
+            <a:ext cx="0" cy="2671572"/>
           </a:xfrm>
           <a:prstGeom prst="line">
             <a:avLst/>
@@ -15666,8 +15666,8 @@
         </p:nvSpPr>
         <p:spPr>
           <a:xfrm flipV="1">
-            <a:off x="3735934" y="1797253"/>
-            <a:ext cx="0" cy="2852014"/>
+            <a:off x="3720897" y="1887474"/>
+            <a:ext cx="0" cy="2671572"/>
           </a:xfrm>
           <a:prstGeom prst="line">
             <a:avLst/>
@@ -15689,8 +15689,8 @@
         </p:nvSpPr>
         <p:spPr>
           <a:xfrm flipV="1">
-            <a:off x="4211269" y="1797253"/>
-            <a:ext cx="0" cy="2852014"/>
+            <a:off x="4166159" y="1887474"/>
+            <a:ext cx="0" cy="2671572"/>
           </a:xfrm>
           <a:prstGeom prst="line">
             <a:avLst/>
@@ -15712,8 +15712,8 @@
         </p:nvSpPr>
         <p:spPr>
           <a:xfrm flipV="1">
-            <a:off x="4686605" y="1797253"/>
-            <a:ext cx="0" cy="2852014"/>
+            <a:off x="4611421" y="1887474"/>
+            <a:ext cx="0" cy="2671572"/>
           </a:xfrm>
           <a:prstGeom prst="line">
             <a:avLst/>
@@ -15735,8 +15735,8 @@
         </p:nvSpPr>
         <p:spPr>
           <a:xfrm flipV="1">
-            <a:off x="5161940" y="1797253"/>
-            <a:ext cx="0" cy="2852014"/>
+            <a:off x="5056683" y="1887474"/>
+            <a:ext cx="0" cy="2671572"/>
           </a:xfrm>
           <a:prstGeom prst="line">
             <a:avLst/>
@@ -15758,8 +15758,8 @@
         </p:nvSpPr>
         <p:spPr>
           <a:xfrm flipV="1">
-            <a:off x="5637276" y="1797253"/>
-            <a:ext cx="0" cy="2852014"/>
+            <a:off x="5501945" y="1887474"/>
+            <a:ext cx="0" cy="2671572"/>
           </a:xfrm>
           <a:prstGeom prst="line">
             <a:avLst/>
@@ -15781,8 +15781,8 @@
         </p:nvSpPr>
         <p:spPr>
           <a:xfrm flipV="1">
-            <a:off x="6112612" y="1797253"/>
-            <a:ext cx="0" cy="2852014"/>
+            <a:off x="5947207" y="1887474"/>
+            <a:ext cx="0" cy="2671572"/>
           </a:xfrm>
           <a:prstGeom prst="line">
             <a:avLst/>
@@ -15804,8 +15804,8 @@
         </p:nvSpPr>
         <p:spPr>
           <a:xfrm>
-            <a:off x="883920" y="4649267"/>
-            <a:ext cx="5228692" cy="0"/>
+            <a:off x="1049325" y="4559046"/>
+            <a:ext cx="4897882" cy="0"/>
           </a:xfrm>
           <a:prstGeom prst="line">
             <a:avLst/>
@@ -15827,8 +15827,8 @@
         </p:nvSpPr>
         <p:spPr>
           <a:xfrm>
-            <a:off x="883920" y="4173931"/>
-            <a:ext cx="5228692" cy="0"/>
+            <a:off x="1049325" y="4113784"/>
+            <a:ext cx="4897882" cy="0"/>
           </a:xfrm>
           <a:prstGeom prst="line">
             <a:avLst/>
@@ -15850,8 +15850,8 @@
         </p:nvSpPr>
         <p:spPr>
           <a:xfrm>
-            <a:off x="883920" y="3698596"/>
-            <a:ext cx="5228692" cy="0"/>
+            <a:off x="1049325" y="3668522"/>
+            <a:ext cx="4897882" cy="0"/>
           </a:xfrm>
           <a:prstGeom prst="line">
             <a:avLst/>
@@ -15873,8 +15873,8 @@
         </p:nvSpPr>
         <p:spPr>
           <a:xfrm>
-            <a:off x="883920" y="3223260"/>
-            <a:ext cx="5228692" cy="0"/>
+            <a:off x="1049325" y="3223260"/>
+            <a:ext cx="4897882" cy="0"/>
           </a:xfrm>
           <a:prstGeom prst="line">
             <a:avLst/>
@@ -15896,8 +15896,8 @@
         </p:nvSpPr>
         <p:spPr>
           <a:xfrm>
-            <a:off x="883920" y="2747924"/>
-            <a:ext cx="5228692" cy="0"/>
+            <a:off x="1049325" y="2777998"/>
+            <a:ext cx="4897882" cy="0"/>
           </a:xfrm>
           <a:prstGeom prst="line">
             <a:avLst/>
@@ -15919,8 +15919,8 @@
         </p:nvSpPr>
         <p:spPr>
           <a:xfrm>
-            <a:off x="883920" y="2272589"/>
-            <a:ext cx="5228692" cy="0"/>
+            <a:off x="1049325" y="2332736"/>
+            <a:ext cx="4897882" cy="0"/>
           </a:xfrm>
           <a:prstGeom prst="line">
             <a:avLst/>
@@ -15942,8 +15942,8 @@
         </p:nvSpPr>
         <p:spPr>
           <a:xfrm>
-            <a:off x="883920" y="1797253"/>
-            <a:ext cx="5228692" cy="0"/>
+            <a:off x="1049325" y="1887474"/>
+            <a:ext cx="4897882" cy="0"/>
           </a:xfrm>
           <a:prstGeom prst="line">
             <a:avLst/>
@@ -15965,8 +15965,8 @@
         </p:nvSpPr>
         <p:spPr>
           <a:xfrm>
-            <a:off x="1359256" y="2272589"/>
-            <a:ext cx="4278020" cy="1901342"/>
+            <a:off x="1494587" y="2332736"/>
+            <a:ext cx="4007358" cy="1781048"/>
           </a:xfrm>
           <a:custGeom>
             <a:avLst/>
@@ -15975,18 +15975,18 @@
             <a:cxnLst/>
             <a:rect l="l" t="t" r="r" b="b"/>
             <a:pathLst>
-              <a:path w="4278020" h="1901342">
+              <a:path w="4007358" h="1781048">
                 <a:moveTo>
-                  <a:pt x="0" y="1901342"/>
+                  <a:pt x="0" y="1781048"/>
                 </a:moveTo>
                 <a:lnTo>
-                  <a:pt x="4278020" y="1901342"/>
+                  <a:pt x="4007358" y="1781048"/>
                 </a:lnTo>
                 <a:lnTo>
-                  <a:pt x="2852014" y="0"/>
+                  <a:pt x="2671572" y="0"/>
                 </a:lnTo>
                 <a:lnTo>
-                  <a:pt x="1426007" y="0"/>
+                  <a:pt x="1335786" y="0"/>
                 </a:lnTo>
                 <a:close/>
               </a:path>
@@ -16009,7 +16009,7 @@
         </p:nvSpPr>
         <p:spPr>
           <a:xfrm>
-            <a:off x="2785262" y="3964381"/>
+            <a:off x="2830373" y="3904234"/>
             <a:ext cx="209550" cy="209550"/>
           </a:xfrm>
           <a:custGeom>
@@ -16049,8 +16049,8 @@
         </p:nvSpPr>
         <p:spPr>
           <a:xfrm>
-            <a:off x="2785262" y="2272589"/>
-            <a:ext cx="0" cy="1901342"/>
+            <a:off x="2830373" y="2332736"/>
+            <a:ext cx="0" cy="1781048"/>
           </a:xfrm>
           <a:prstGeom prst="line">
             <a:avLst/>
@@ -16072,7 +16072,7 @@
         </p:nvSpPr>
         <p:spPr>
           <a:xfrm>
-            <a:off x="3116504" y="4250766"/>
+            <a:off x="3116504" y="4190619"/>
             <a:ext cx="763524" cy="349250"/>
           </a:xfrm>
           <a:prstGeom prst="rect">
@@ -16111,7 +16111,7 @@
         </p:nvSpPr>
         <p:spPr>
           <a:xfrm>
-            <a:off x="3116504" y="1846504"/>
+            <a:off x="3116504" y="1906651"/>
             <a:ext cx="763524" cy="349250"/>
           </a:xfrm>
           <a:prstGeom prst="rect">
@@ -16150,7 +16150,7 @@
         </p:nvSpPr>
         <p:spPr>
           <a:xfrm>
-            <a:off x="1321242" y="2771694"/>
+            <a:off x="1411463" y="2771694"/>
             <a:ext cx="763524" cy="349250"/>
           </a:xfrm>
           <a:prstGeom prst="rect">
@@ -16189,7 +16189,7 @@
         </p:nvSpPr>
         <p:spPr>
           <a:xfrm>
-            <a:off x="2833776" y="3048635"/>
+            <a:off x="2878887" y="3048635"/>
             <a:ext cx="763524" cy="349250"/>
           </a:xfrm>
           <a:prstGeom prst="rect">
@@ -17756,8 +17756,8 @@
         </p:nvSpPr>
         <p:spPr>
           <a:xfrm>
-            <a:off x="883920" y="2693680"/>
-            <a:ext cx="4263360" cy="1421120"/>
+            <a:off x="1049325" y="2803950"/>
+            <a:ext cx="3932550" cy="1310850"/>
           </a:xfrm>
           <a:custGeom>
             <a:avLst/>
@@ -17766,15 +17766,15 @@
             <a:cxnLst/>
             <a:rect l="l" t="t" r="r" b="b"/>
             <a:pathLst>
-              <a:path w="4263360" h="1421120">
+              <a:path w="3932550" h="1310850">
                 <a:moveTo>
-                  <a:pt x="0" y="1421120"/>
+                  <a:pt x="0" y="1310850"/>
                 </a:moveTo>
                 <a:lnTo>
-                  <a:pt x="4263360" y="1421120"/>
+                  <a:pt x="3932550" y="1310850"/>
                 </a:lnTo>
                 <a:lnTo>
-                  <a:pt x="2131680" y="0"/>
+                  <a:pt x="1966275" y="0"/>
                 </a:lnTo>
                 <a:close/>
               </a:path>
@@ -17799,8 +17799,8 @@
         </p:nvSpPr>
         <p:spPr>
           <a:xfrm>
-            <a:off x="883920" y="4114800"/>
-            <a:ext cx="4263360" cy="1421120"/>
+            <a:off x="1049325" y="4114800"/>
+            <a:ext cx="3932550" cy="1310850"/>
           </a:xfrm>
           <a:custGeom>
             <a:avLst/>
@@ -17809,15 +17809,15 @@
             <a:cxnLst/>
             <a:rect l="l" t="t" r="r" b="b"/>
             <a:pathLst>
-              <a:path w="4263360" h="1421120">
+              <a:path w="3932550" h="1310850">
                 <a:moveTo>
                   <a:pt x="0" y="0"/>
                 </a:moveTo>
                 <a:lnTo>
-                  <a:pt x="2131680" y="1421120"/>
+                  <a:pt x="1966275" y="1310850"/>
                 </a:lnTo>
                 <a:lnTo>
-                  <a:pt x="4263360" y="0"/>
+                  <a:pt x="3932550" y="0"/>
                 </a:lnTo>
                 <a:close/>
               </a:path>
@@ -17882,8 +17882,8 @@
         </p:nvSpPr>
         <p:spPr>
           <a:xfrm>
-            <a:off x="3015600" y="2693680"/>
-            <a:ext cx="0" cy="1421120"/>
+            <a:off x="3015600" y="2803950"/>
+            <a:ext cx="0" cy="1310850"/>
           </a:xfrm>
           <a:prstGeom prst="line">
             <a:avLst/>
@@ -17906,7 +17906,7 @@
         <p:spPr>
           <a:xfrm>
             <a:off x="3015600" y="4114800"/>
-            <a:ext cx="0" cy="1421120"/>
+            <a:ext cx="0" cy="1310850"/>
           </a:xfrm>
           <a:prstGeom prst="line">
             <a:avLst/>
@@ -17928,7 +17928,7 @@
         </p:nvSpPr>
         <p:spPr>
           <a:xfrm>
-            <a:off x="3064114" y="3229615"/>
+            <a:off x="3064114" y="3284750"/>
             <a:ext cx="763524" cy="349250"/>
           </a:xfrm>
           <a:prstGeom prst="rect">
@@ -17967,7 +17967,7 @@
         </p:nvSpPr>
         <p:spPr>
           <a:xfrm>
-            <a:off x="3064114" y="4650735"/>
+            <a:off x="3064114" y="4595600"/>
             <a:ext cx="763524" cy="349250"/>
           </a:xfrm>
           <a:prstGeom prst="rect">
@@ -18006,7 +18006,7 @@
         </p:nvSpPr>
         <p:spPr>
           <a:xfrm>
-            <a:off x="2136446" y="3442783"/>
+            <a:off x="2175040" y="3481378"/>
             <a:ext cx="763524" cy="349250"/>
           </a:xfrm>
           <a:prstGeom prst="rect">
